--- a/Metodos_Estatisticos/slides/semana_3_a_4.pptx
+++ b/Metodos_Estatisticos/slides/semana_3_a_4.pptx
@@ -358,6 +358,30 @@
     </pc:docChg>
   </pc:docChgLst>
   <pc:docChgLst>
+    <pc:chgData name="Renan Xavier Cortes" userId="d6af805853004405" providerId="LiveId" clId="{C3E55453-77F6-45E2-9765-86B4743BD83E}"/>
+    <pc:docChg chg="modSld">
+      <pc:chgData name="Renan Xavier Cortes" userId="d6af805853004405" providerId="LiveId" clId="{C3E55453-77F6-45E2-9765-86B4743BD83E}" dt="2026-02-08T19:25:40.396" v="130" actId="1076"/>
+      <pc:docMkLst>
+        <pc:docMk/>
+      </pc:docMkLst>
+      <pc:sldChg chg="modSp mod">
+        <pc:chgData name="Renan Xavier Cortes" userId="d6af805853004405" providerId="LiveId" clId="{C3E55453-77F6-45E2-9765-86B4743BD83E}" dt="2026-02-08T19:25:40.396" v="130" actId="1076"/>
+        <pc:sldMkLst>
+          <pc:docMk/>
+          <pc:sldMk cId="2921823341" sldId="260"/>
+        </pc:sldMkLst>
+        <pc:spChg chg="mod">
+          <ac:chgData name="Renan Xavier Cortes" userId="d6af805853004405" providerId="LiveId" clId="{C3E55453-77F6-45E2-9765-86B4743BD83E}" dt="2026-02-08T19:25:40.396" v="130" actId="1076"/>
+          <ac:spMkLst>
+            <pc:docMk/>
+            <pc:sldMk cId="2921823341" sldId="260"/>
+            <ac:spMk id="14" creationId="{427DBFEB-81BF-4CC3-A411-FBF43D295C56}"/>
+          </ac:spMkLst>
+        </pc:spChg>
+      </pc:sldChg>
+    </pc:docChg>
+  </pc:docChgLst>
+  <pc:docChgLst>
     <pc:chgData name="Renan Xavier Cortes" userId="d6af805853004405" providerId="LiveId" clId="{6CBA8CAD-390F-4A11-B907-BBB4B6E0B449}"/>
     <pc:docChg chg="undo custSel addSld delSld modSld">
       <pc:chgData name="Renan Xavier Cortes" userId="d6af805853004405" providerId="LiveId" clId="{6CBA8CAD-390F-4A11-B907-BBB4B6E0B449}" dt="2026-01-21T21:00:53.358" v="2269"/>
@@ -1637,7 +1661,7 @@
           <a:p>
             <a:fld id="{9B3F8303-3E6A-4B9A-B114-90BC24763552}" type="datetimeFigureOut">
               <a:rPr lang="pt-BR" smtClean="0"/>
-              <a:t>26/01/2026</a:t>
+              <a:t>08/02/2026</a:t>
             </a:fld>
             <a:endParaRPr lang="pt-BR"/>
           </a:p>
@@ -2219,7 +2243,7 @@
           <a:p>
             <a:fld id="{6D1CE400-4242-4B09-9036-D13CC6199FDE}" type="datetimeFigureOut">
               <a:rPr lang="pt-BR" smtClean="0"/>
-              <a:t>26/01/2026</a:t>
+              <a:t>08/02/2026</a:t>
             </a:fld>
             <a:endParaRPr lang="pt-BR"/>
           </a:p>
@@ -2417,7 +2441,7 @@
           <a:p>
             <a:fld id="{6D1CE400-4242-4B09-9036-D13CC6199FDE}" type="datetimeFigureOut">
               <a:rPr lang="pt-BR" smtClean="0"/>
-              <a:t>26/01/2026</a:t>
+              <a:t>08/02/2026</a:t>
             </a:fld>
             <a:endParaRPr lang="pt-BR"/>
           </a:p>
@@ -2625,7 +2649,7 @@
           <a:p>
             <a:fld id="{6D1CE400-4242-4B09-9036-D13CC6199FDE}" type="datetimeFigureOut">
               <a:rPr lang="pt-BR" smtClean="0"/>
-              <a:t>26/01/2026</a:t>
+              <a:t>08/02/2026</a:t>
             </a:fld>
             <a:endParaRPr lang="pt-BR"/>
           </a:p>
@@ -2823,7 +2847,7 @@
           <a:p>
             <a:fld id="{6D1CE400-4242-4B09-9036-D13CC6199FDE}" type="datetimeFigureOut">
               <a:rPr lang="pt-BR" smtClean="0"/>
-              <a:t>26/01/2026</a:t>
+              <a:t>08/02/2026</a:t>
             </a:fld>
             <a:endParaRPr lang="pt-BR"/>
           </a:p>
@@ -3098,7 +3122,7 @@
           <a:p>
             <a:fld id="{6D1CE400-4242-4B09-9036-D13CC6199FDE}" type="datetimeFigureOut">
               <a:rPr lang="pt-BR" smtClean="0"/>
-              <a:t>26/01/2026</a:t>
+              <a:t>08/02/2026</a:t>
             </a:fld>
             <a:endParaRPr lang="pt-BR"/>
           </a:p>
@@ -3363,7 +3387,7 @@
           <a:p>
             <a:fld id="{6D1CE400-4242-4B09-9036-D13CC6199FDE}" type="datetimeFigureOut">
               <a:rPr lang="pt-BR" smtClean="0"/>
-              <a:t>26/01/2026</a:t>
+              <a:t>08/02/2026</a:t>
             </a:fld>
             <a:endParaRPr lang="pt-BR"/>
           </a:p>
@@ -3775,7 +3799,7 @@
           <a:p>
             <a:fld id="{6D1CE400-4242-4B09-9036-D13CC6199FDE}" type="datetimeFigureOut">
               <a:rPr lang="pt-BR" smtClean="0"/>
-              <a:t>26/01/2026</a:t>
+              <a:t>08/02/2026</a:t>
             </a:fld>
             <a:endParaRPr lang="pt-BR"/>
           </a:p>
@@ -3916,7 +3940,7 @@
           <a:p>
             <a:fld id="{6D1CE400-4242-4B09-9036-D13CC6199FDE}" type="datetimeFigureOut">
               <a:rPr lang="pt-BR" smtClean="0"/>
-              <a:t>26/01/2026</a:t>
+              <a:t>08/02/2026</a:t>
             </a:fld>
             <a:endParaRPr lang="pt-BR"/>
           </a:p>
@@ -4029,7 +4053,7 @@
           <a:p>
             <a:fld id="{6D1CE400-4242-4B09-9036-D13CC6199FDE}" type="datetimeFigureOut">
               <a:rPr lang="pt-BR" smtClean="0"/>
-              <a:t>26/01/2026</a:t>
+              <a:t>08/02/2026</a:t>
             </a:fld>
             <a:endParaRPr lang="pt-BR"/>
           </a:p>
@@ -4340,7 +4364,7 @@
           <a:p>
             <a:fld id="{6D1CE400-4242-4B09-9036-D13CC6199FDE}" type="datetimeFigureOut">
               <a:rPr lang="pt-BR" smtClean="0"/>
-              <a:t>26/01/2026</a:t>
+              <a:t>08/02/2026</a:t>
             </a:fld>
             <a:endParaRPr lang="pt-BR"/>
           </a:p>
@@ -4628,7 +4652,7 @@
           <a:p>
             <a:fld id="{6D1CE400-4242-4B09-9036-D13CC6199FDE}" type="datetimeFigureOut">
               <a:rPr lang="pt-BR" smtClean="0"/>
-              <a:t>26/01/2026</a:t>
+              <a:t>08/02/2026</a:t>
             </a:fld>
             <a:endParaRPr lang="pt-BR"/>
           </a:p>
@@ -4872,7 +4896,7 @@
           <a:p>
             <a:fld id="{6D1CE400-4242-4B09-9036-D13CC6199FDE}" type="datetimeFigureOut">
               <a:rPr lang="pt-BR" smtClean="0"/>
-              <a:t>26/01/2026</a:t>
+              <a:t>08/02/2026</a:t>
             </a:fld>
             <a:endParaRPr lang="pt-BR"/>
           </a:p>
@@ -5994,8 +6018,8 @@
         </p:nvSpPr>
         <p:spPr>
           <a:xfrm>
-            <a:off x="1053330" y="2469084"/>
-            <a:ext cx="10310191" cy="2378600"/>
+            <a:off x="1229194" y="1768050"/>
+            <a:ext cx="10418163" cy="3802066"/>
           </a:xfrm>
           <a:prstGeom prst="rect">
             <a:avLst/>
@@ -6027,8 +6051,76 @@
                 <a:solidFill>
                   <a:srgbClr val="0070C0"/>
                 </a:solidFill>
+                <a:hlinkClick r:id="rId3"/>
               </a:rPr>
               <a:t>https://www.ufrgs.br/probabilidade-estatistica/slides/slides_1/1-4_Descritiva_medidas%20descritivas.pdf</a:t>
+            </a:r>
+            <a:endParaRPr lang="pt-BR" sz="2000" b="1" dirty="0">
+              <a:solidFill>
+                <a:srgbClr val="0070C0"/>
+              </a:solidFill>
+            </a:endParaRPr>
+          </a:p>
+          <a:p>
+            <a:pPr marL="285750" indent="-285750">
+              <a:lnSpc>
+                <a:spcPct val="150000"/>
+              </a:lnSpc>
+              <a:spcAft>
+                <a:spcPts val="110"/>
+              </a:spcAft>
+              <a:buFont typeface="Wingdings" panose="05000000000000000000" pitchFamily="2" charset="2"/>
+              <a:buChar char="Ø"/>
+            </a:pPr>
+            <a:endParaRPr lang="pt-BR" sz="2000" b="1" dirty="0">
+              <a:solidFill>
+                <a:srgbClr val="0070C0"/>
+              </a:solidFill>
+            </a:endParaRPr>
+          </a:p>
+          <a:p>
+            <a:pPr marL="285750" indent="-285750">
+              <a:lnSpc>
+                <a:spcPct val="150000"/>
+              </a:lnSpc>
+              <a:spcAft>
+                <a:spcPts val="110"/>
+              </a:spcAft>
+              <a:buFont typeface="Wingdings" panose="05000000000000000000" pitchFamily="2" charset="2"/>
+              <a:buChar char="Ø"/>
+            </a:pPr>
+            <a:r>
+              <a:rPr lang="pt-BR" sz="2000" b="1" dirty="0"/>
+              <a:t>Aplicativo de Análise Exploratória de Dados: </a:t>
+            </a:r>
+            <a:r>
+              <a:rPr lang="pt-BR" sz="2000" b="1" dirty="0">
+                <a:hlinkClick r:id="rId4">
+                  <a:extLst>
+                    <a:ext uri="{A12FA001-AC4F-418D-AE19-62706E023703}">
+                      <ahyp:hlinkClr xmlns:ahyp="http://schemas.microsoft.com/office/drawing/2018/hyperlinkcolor" val="tx"/>
+                    </a:ext>
+                  </a:extLst>
+                </a:hlinkClick>
+              </a:rPr>
+              <a:t>https://istats.shinyapps.io/EDA_quantitative/</a:t>
+            </a:r>
+            <a:endParaRPr lang="pt-BR" sz="2000" b="1" dirty="0"/>
+          </a:p>
+          <a:p>
+            <a:pPr marL="285750" indent="-285750">
+              <a:lnSpc>
+                <a:spcPct val="150000"/>
+              </a:lnSpc>
+              <a:spcAft>
+                <a:spcPts val="110"/>
+              </a:spcAft>
+              <a:buFont typeface="Wingdings" panose="05000000000000000000" pitchFamily="2" charset="2"/>
+              <a:buChar char="Ø"/>
+            </a:pPr>
+            <a:r>
+              <a:rPr lang="pt-BR" sz="2000" b="1" dirty="0"/>
+              <a:t>Média vs. Mediana: https://istats.shinyapps.io/MeanvsMedian/</a:t>
             </a:r>
           </a:p>
           <a:p>
@@ -6057,7 +6149,7 @@
             </a:pPr>
             <a:r>
               <a:rPr lang="pt-BR" sz="2000" b="1" dirty="0"/>
-              <a:t>Código para gráficos interativos presentes em ... </a:t>
+              <a:t>Código para os demais aplicativo interativos presentes no Moodle</a:t>
             </a:r>
           </a:p>
         </p:txBody>
@@ -6077,7 +6169,7 @@
           <p:nvPr/>
         </p:nvPicPr>
         <p:blipFill>
-          <a:blip r:embed="rId3">
+          <a:blip r:embed="rId5">
             <a:extLst>
               <a:ext uri="{28A0092B-C50C-407E-A947-70E740481C1C}">
                 <a14:useLocalDpi xmlns:a14="http://schemas.microsoft.com/office/drawing/2010/main" val="0"/>
@@ -6124,7 +6216,7 @@
           <p:nvPr/>
         </p:nvPicPr>
         <p:blipFill>
-          <a:blip r:embed="rId4">
+          <a:blip r:embed="rId6">
             <a:extLst>
               <a:ext uri="{28A0092B-C50C-407E-A947-70E740481C1C}">
                 <a14:useLocalDpi xmlns:a14="http://schemas.microsoft.com/office/drawing/2010/main" val="0"/>
